--- a/src/beril_presentation_maker/skill/references/templates/kbase-presentation-master.pptx
+++ b/src/beril_presentation_maker/skill/references/templates/kbase-presentation-master.pptx
@@ -811,8 +811,8 @@
         </p:nvSpPr>
         <p:spPr>
           <a:xfrm>
-            <a:off x="91440" y="125100"/>
-            <a:ext cx="8520600" cy="572700"/>
+            <a:off x="-83050" y="1934828"/>
+            <a:ext cx="9144000" cy="1273844"/>
           </a:xfrm>
           <a:prstGeom prst="rect">
             <a:avLst/>
@@ -820,19 +820,19 @@
         </p:spPr>
         <p:txBody>
           <a:bodyPr spcFirstLastPara="1" wrap="square" lIns="91425" tIns="91425" rIns="91425" bIns="91425" anchor="t" anchorCtr="0">
-            <a:normAutofit/>
+            <a:noAutofit/>
           </a:bodyPr>
           <a:lstStyle>
-            <a:lvl1pPr lvl="0" rtl="0">
-              <a:spcBef>
-                <a:spcPts val="0"/>
-              </a:spcBef>
-              <a:spcAft>
-                <a:spcPts val="0"/>
-              </a:spcAft>
-              <a:buSzPts val="2800"/>
-              <a:buNone/>
-              <a:defRPr/>
+            <a:lvl1pPr lvl="0" rtl="0" algn="ctr">
+              <a:spcBef>
+                <a:spcPts val="0"/>
+              </a:spcBef>
+              <a:spcAft>
+                <a:spcPts val="0"/>
+              </a:spcAft>
+              <a:buSzPts val="2800"/>
+              <a:buNone/>
+              <a:defRPr sz="6000"/>
             </a:lvl1pPr>
             <a:lvl2pPr lvl="1" rtl="0">
               <a:spcBef>
@@ -1499,7 +1499,7 @@
         </p:nvSpPr>
         <p:spPr>
           <a:xfrm>
-            <a:off x="311700" y="148750"/>
+            <a:off x="139684" y="658650"/>
             <a:ext cx="8520600" cy="572700"/>
           </a:xfrm>
           <a:prstGeom prst="rect">
@@ -1508,7 +1508,7 @@
         </p:spPr>
         <p:txBody>
           <a:bodyPr spcFirstLastPara="1" wrap="square" lIns="91425" tIns="91425" rIns="91425" bIns="91425" anchor="t" anchorCtr="0">
-            <a:normAutofit/>
+            <a:noAutofit/>
           </a:bodyPr>
           <a:lstStyle>
             <a:lvl1pPr lvl="0" rtl="0">
@@ -1520,7 +1520,7 @@
               </a:spcAft>
               <a:buSzPts val="2800"/>
               <a:buNone/>
-              <a:defRPr/>
+              <a:defRPr sz="3600"/>
             </a:lvl1pPr>
             <a:lvl2pPr lvl="1" rtl="0">
               <a:spcBef>
@@ -1713,8 +1713,8 @@
         </p:blipFill>
         <p:spPr>
           <a:xfrm>
-            <a:off x="7612298" y="4572712"/>
-            <a:ext cx="1448652" cy="498125"/>
+            <a:off x="-3000" y="0"/>
+            <a:ext cx="9150000" cy="832919"/>
           </a:xfrm>
           <a:prstGeom prst="rect">
             <a:avLst/>
@@ -1942,8 +1942,8 @@
         </p:nvSpPr>
         <p:spPr>
           <a:xfrm>
-            <a:off x="311700" y="2571750"/>
-            <a:ext cx="4300800" cy="1997100"/>
+            <a:off x="112523" y="981671"/>
+            <a:ext cx="4386578" cy="3479572"/>
           </a:xfrm>
           <a:prstGeom prst="rect">
             <a:avLst/>
@@ -2071,8 +2071,8 @@
         </p:nvSpPr>
         <p:spPr>
           <a:xfrm>
-            <a:off x="4644900" y="2403500"/>
-            <a:ext cx="4187400" cy="2122800"/>
+            <a:off x="4572000" y="981670"/>
+            <a:ext cx="4488950" cy="3479572"/>
           </a:xfrm>
           <a:prstGeom prst="rect">
             <a:avLst/>
@@ -3771,7 +3771,7 @@
         </p:blipFill>
         <p:spPr>
           <a:xfrm>
-            <a:off x="-2975400" y="0"/>
+            <a:off x="-3" y="0"/>
             <a:ext cx="9144003" cy="5143501"/>
           </a:xfrm>
           <a:prstGeom prst="rect">
@@ -3796,7 +3796,7 @@
         <p:spPr>
           <a:xfrm>
             <a:off x="311700" y="1185250"/>
-            <a:ext cx="5856900" cy="3383700"/>
+            <a:ext cx="4405155" cy="3383700"/>
           </a:xfrm>
           <a:prstGeom prst="rect">
             <a:avLst/>

--- a/src/beril_presentation_maker/skill/references/templates/kbase-presentation-master.pptx
+++ b/src/beril_presentation_maker/skill/references/templates/kbase-presentation-master.pptx
@@ -1448,7 +1448,7 @@
         <p:spPr>
           <a:xfrm rot="10800000">
             <a:off x="-3000" y="0"/>
-            <a:ext cx="9150000" cy="2462700"/>
+            <a:ext cx="9150000" cy="832919"/>
           </a:xfrm>
           <a:prstGeom prst="round1Rect">
             <a:avLst>
@@ -1499,15 +1499,15 @@
         </p:nvSpPr>
         <p:spPr>
           <a:xfrm>
-            <a:off x="139684" y="658650"/>
-            <a:ext cx="8520600" cy="572700"/>
+            <a:off x="137160" y="146304"/>
+            <a:ext cx="8522208" cy="576072"/>
           </a:xfrm>
           <a:prstGeom prst="rect">
             <a:avLst/>
           </a:prstGeom>
         </p:spPr>
         <p:txBody>
-          <a:bodyPr spcFirstLastPara="1" wrap="square" lIns="91425" tIns="91425" rIns="91425" bIns="91425" anchor="t" anchorCtr="0">
+          <a:bodyPr spcFirstLastPara="1" wrap="square" lIns="91425" tIns="91425" rIns="91425" bIns="91425" anchor="ctr" anchorCtr="0">
             <a:noAutofit/>
           </a:bodyPr>
           <a:lstStyle>
@@ -1713,8 +1713,8 @@
         </p:blipFill>
         <p:spPr>
           <a:xfrm>
-            <a:off x="-3000" y="0"/>
-            <a:ext cx="9150000" cy="832919"/>
+            <a:off x="7612298" y="4572712"/>
+            <a:ext cx="1448652" cy="498125"/>
           </a:xfrm>
           <a:prstGeom prst="rect">
             <a:avLst/>
@@ -1762,7 +1762,7 @@
         <p:spPr>
           <a:xfrm rot="10800000">
             <a:off x="-3000" y="0"/>
-            <a:ext cx="9150000" cy="2462700"/>
+            <a:ext cx="9150000" cy="832919"/>
           </a:xfrm>
           <a:prstGeom prst="round1Rect">
             <a:avLst>

--- a/src/beril_presentation_maker/skill/references/templates/kbase-presentation-master.pptx
+++ b/src/beril_presentation_maker/skill/references/templates/kbase-presentation-master.pptx
@@ -820,7 +820,7 @@
         </p:spPr>
         <p:txBody>
           <a:bodyPr spcFirstLastPara="1" wrap="square" lIns="91425" tIns="91425" rIns="91425" bIns="91425" anchor="t" anchorCtr="0">
-            <a:noAutofit/>
+            <a:normAutofit fontScale="80000" lnSpcReduction="20000"/>
           </a:bodyPr>
           <a:lstStyle>
             <a:lvl1pPr lvl="0" rtl="0" algn="ctr">
@@ -1250,7 +1250,7 @@
         </p:spPr>
         <p:txBody>
           <a:bodyPr spcFirstLastPara="1" wrap="square" lIns="91425" tIns="91425" rIns="91425" bIns="91425" anchor="t" anchorCtr="0">
-            <a:normAutofit/>
+            <a:normAutofit fontScale="80000" lnSpcReduction="20000"/>
           </a:bodyPr>
           <a:lstStyle>
             <a:lvl1pPr lvl="0" rtl="0">
@@ -1822,7 +1822,7 @@
         </p:spPr>
         <p:txBody>
           <a:bodyPr spcFirstLastPara="1" wrap="square" lIns="91425" tIns="91425" rIns="91425" bIns="91425" anchor="t" anchorCtr="0">
-            <a:normAutofit/>
+            <a:normAutofit fontScale="80000" lnSpcReduction="20000"/>
           </a:bodyPr>
           <a:lstStyle>
             <a:lvl1pPr lvl="0" rtl="0">
@@ -2474,7 +2474,7 @@
         </p:spPr>
         <p:txBody>
           <a:bodyPr spcFirstLastPara="1" wrap="square" lIns="91425" tIns="91425" rIns="91425" bIns="91425" anchor="t" anchorCtr="0">
-            <a:normAutofit/>
+            <a:normAutofit fontScale="80000" lnSpcReduction="20000"/>
           </a:bodyPr>
           <a:lstStyle>
             <a:lvl1pPr lvl="0" rtl="0">
@@ -2841,7 +2841,7 @@
         </p:spPr>
         <p:txBody>
           <a:bodyPr spcFirstLastPara="1" wrap="square" lIns="91425" tIns="91425" rIns="91425" bIns="91425" anchor="t" anchorCtr="0">
-            <a:normAutofit/>
+            <a:normAutofit fontScale="80000" lnSpcReduction="20000"/>
           </a:bodyPr>
           <a:lstStyle>
             <a:lvl1pPr lvl="0" rtl="0">
@@ -3351,8 +3351,8 @@
           </a:prstGeom>
         </p:spPr>
         <p:txBody>
-          <a:bodyPr spcFirstLastPara="1" wrap="square" lIns="91425" tIns="91425" rIns="91425" bIns="91425" anchor="b" anchorCtr="0">
-            <a:normAutofit/>
+          <a:bodyPr spcFirstLastPara="1" wrap="square" lIns="91425" tIns="91425" rIns="91425" bIns="91425" anchor="t" anchorCtr="0">
+            <a:normAutofit fontScale="80000" lnSpcReduction="20000"/>
           </a:bodyPr>
           <a:lstStyle>
             <a:lvl1pPr lvl="0" algn="ctr" rtl="0">
@@ -3933,7 +3933,7 @@
         </p:spPr>
         <p:txBody>
           <a:bodyPr spcFirstLastPara="1" wrap="square" lIns="91425" tIns="91425" rIns="91425" bIns="91425" anchor="t" anchorCtr="0">
-            <a:normAutofit/>
+            <a:normAutofit fontScale="80000" lnSpcReduction="20000"/>
           </a:bodyPr>
           <a:lstStyle>
             <a:lvl1pPr lvl="0" rtl="0">
@@ -4383,7 +4383,7 @@
         </p:spPr>
         <p:txBody>
           <a:bodyPr spcFirstLastPara="1" wrap="square" lIns="91425" tIns="91425" rIns="91425" bIns="91425" anchor="t" anchorCtr="0">
-            <a:normAutofit/>
+            <a:normAutofit fontScale="80000" lnSpcReduction="20000"/>
           </a:bodyPr>
           <a:lstStyle>
             <a:lvl1pPr lvl="0" rtl="0">
@@ -4750,7 +4750,7 @@
         </p:spPr>
         <p:txBody>
           <a:bodyPr spcFirstLastPara="1" wrap="square" lIns="91425" tIns="91425" rIns="91425" bIns="91425" anchor="t" anchorCtr="0">
-            <a:normAutofit/>
+            <a:normAutofit fontScale="80000" lnSpcReduction="20000"/>
           </a:bodyPr>
           <a:lstStyle>
             <a:lvl1pPr lvl="0" rtl="0">
@@ -5117,7 +5117,7 @@
         </p:spPr>
         <p:txBody>
           <a:bodyPr spcFirstLastPara="1" wrap="square" lIns="91425" tIns="91425" rIns="91425" bIns="91425" anchor="t" anchorCtr="0">
-            <a:normAutofit/>
+            <a:normAutofit fontScale="80000" lnSpcReduction="20000"/>
           </a:bodyPr>
           <a:lstStyle>
             <a:lvl1pPr lvl="0" rtl="0">
@@ -5484,7 +5484,7 @@
         </p:spPr>
         <p:txBody>
           <a:bodyPr spcFirstLastPara="1" wrap="square" lIns="91425" tIns="91425" rIns="91425" bIns="91425" anchor="t" anchorCtr="0">
-            <a:normAutofit/>
+            <a:normAutofit fontScale="80000" lnSpcReduction="20000"/>
           </a:bodyPr>
           <a:lstStyle>
             <a:lvl1pPr lvl="0" rtl="0">
@@ -5851,7 +5851,7 @@
         </p:spPr>
         <p:txBody>
           <a:bodyPr spcFirstLastPara="1" wrap="square" lIns="91425" tIns="91425" rIns="91425" bIns="91425" anchor="t" anchorCtr="0">
-            <a:normAutofit/>
+            <a:normAutofit fontScale="80000" lnSpcReduction="20000"/>
           </a:bodyPr>
           <a:lstStyle>
             <a:lvl1pPr lvl="0" rtl="0">
@@ -6218,7 +6218,7 @@
         </p:spPr>
         <p:txBody>
           <a:bodyPr spcFirstLastPara="1" wrap="square" lIns="91425" tIns="91425" rIns="91425" bIns="91425" anchor="t" anchorCtr="0">
-            <a:normAutofit/>
+            <a:normAutofit fontScale="80000" lnSpcReduction="20000"/>
           </a:bodyPr>
           <a:lstStyle>
             <a:lvl1pPr lvl="0" rtl="0">

--- a/src/beril_presentation_maker/skill/references/templates/kbase-presentation-master.pptx
+++ b/src/beril_presentation_maker/skill/references/templates/kbase-presentation-master.pptx
@@ -832,7 +832,7 @@
               </a:spcAft>
               <a:buSzPts val="2800"/>
               <a:buNone/>
-              <a:defRPr sz="6000"/>
+              <a:defRPr sz="4000"/>
             </a:lvl1pPr>
             <a:lvl2pPr lvl="1" rtl="0">
               <a:spcBef>

--- a/src/beril_presentation_maker/skill/references/templates/kbase-presentation-master.pptx
+++ b/src/beril_presentation_maker/skill/references/templates/kbase-presentation-master.pptx
@@ -811,7 +811,7 @@
         </p:nvSpPr>
         <p:spPr>
           <a:xfrm>
-            <a:off x="-83050" y="1934828"/>
+            <a:off x="0" y="1934828"/>
             <a:ext cx="9144000" cy="1273844"/>
           </a:xfrm>
           <a:prstGeom prst="rect">
@@ -4254,7 +4254,7 @@
         </p:spPr>
         <p:txBody>
           <a:bodyPr spcFirstLastPara="1" wrap="square" lIns="91425" tIns="91425" rIns="91425" bIns="91425" anchor="t" anchorCtr="0">
-            <a:normAutofit/>
+            <a:normAutofit fontScale="80000" lnSpcReduction="20000"/>
           </a:bodyPr>
           <a:lstStyle>
             <a:lvl1pPr marL="457200" lvl="0" indent="-342900" rtl="0">
@@ -4979,8 +4979,8 @@
         </p:nvSpPr>
         <p:spPr>
           <a:xfrm>
-            <a:off x="311700" y="1071975"/>
-            <a:ext cx="8520600" cy="3496800"/>
+            <a:off x="311700" y="1188720"/>
+            <a:ext cx="8521700" cy="3657600"/>
           </a:xfrm>
           <a:prstGeom prst="rect">
             <a:avLst/>
@@ -4988,7 +4988,7 @@
         </p:spPr>
         <p:txBody>
           <a:bodyPr spcFirstLastPara="1" wrap="square" lIns="91425" tIns="91425" rIns="91425" bIns="91425" anchor="t" anchorCtr="0">
-            <a:normAutofit/>
+            <a:normAutofit fontScale="80000" lnSpcReduction="20000"/>
           </a:bodyPr>
           <a:lstStyle>
             <a:lvl1pPr marL="457200" lvl="0" indent="-342900" rtl="0">
@@ -5108,8 +5108,8 @@
         </p:nvSpPr>
         <p:spPr>
           <a:xfrm>
-            <a:off x="91440" y="125100"/>
-            <a:ext cx="8520600" cy="572700"/>
+            <a:off x="91440" y="128016"/>
+            <a:ext cx="8521700" cy="914400"/>
           </a:xfrm>
           <a:prstGeom prst="rect">
             <a:avLst/>
@@ -5722,7 +5722,7 @@
         </p:spPr>
         <p:txBody>
           <a:bodyPr spcFirstLastPara="1" wrap="square" lIns="91425" tIns="91425" rIns="91425" bIns="91425" anchor="t" anchorCtr="0">
-            <a:normAutofit/>
+            <a:normAutofit fontScale="80000" lnSpcReduction="20000"/>
           </a:bodyPr>
           <a:lstStyle>
             <a:lvl1pPr marL="457200" lvl="0" indent="-342900" rtl="0">

--- a/src/beril_presentation_maker/skill/references/templates/kbase-presentation-master.pptx
+++ b/src/beril_presentation_maker/skill/references/templates/kbase-presentation-master.pptx
@@ -4979,8 +4979,8 @@
         </p:nvSpPr>
         <p:spPr>
           <a:xfrm>
-            <a:off x="311700" y="1188720"/>
-            <a:ext cx="8521700" cy="3657600"/>
+            <a:off x="311700" y="1417320"/>
+            <a:ext cx="8521700" cy="3429000"/>
           </a:xfrm>
           <a:prstGeom prst="rect">
             <a:avLst/>
@@ -5109,7 +5109,7 @@
         <p:spPr>
           <a:xfrm>
             <a:off x="91440" y="128016"/>
-            <a:ext cx="8521700" cy="914400"/>
+            <a:ext cx="8521700" cy="1188720"/>
           </a:xfrm>
           <a:prstGeom prst="rect">
             <a:avLst/>

--- a/src/beril_presentation_maker/skill/references/templates/kbase-presentation-master.pptx
+++ b/src/beril_presentation_maker/skill/references/templates/kbase-presentation-master.pptx
@@ -728,34 +728,6 @@
           <a:chExt cx="0" cy="0"/>
         </a:xfrm>
       </p:grpSpPr>
-      <p:pic>
-        <p:nvPicPr>
-          <p:cNvPr id="96" name="Google Shape;96;p13"/>
-          <p:cNvPicPr preferRelativeResize="0"/>
-          <p:nvPr/>
-        </p:nvPicPr>
-        <p:blipFill>
-          <a:blip r:embed="rId2">
-            <a:alphaModFix/>
-          </a:blip>
-          <a:stretch>
-            <a:fillRect/>
-          </a:stretch>
-        </p:blipFill>
-        <p:spPr>
-          <a:xfrm>
-            <a:off x="0" y="0"/>
-            <a:ext cx="9143999" cy="5146622"/>
-          </a:xfrm>
-          <a:prstGeom prst="rect">
-            <a:avLst/>
-          </a:prstGeom>
-          <a:noFill/>
-          <a:ln>
-            <a:noFill/>
-          </a:ln>
-        </p:spPr>
-      </p:pic>
       <p:sp>
         <p:nvSpPr>
           <p:cNvPr id="97" name="Google Shape;97;p13"/>
@@ -1009,34 +981,6 @@
           <a:chExt cx="0" cy="0"/>
         </a:xfrm>
       </p:grpSpPr>
-      <p:pic>
-        <p:nvPicPr>
-          <p:cNvPr id="107" name="Google Shape;107;p15"/>
-          <p:cNvPicPr preferRelativeResize="0"/>
-          <p:nvPr/>
-        </p:nvPicPr>
-        <p:blipFill>
-          <a:blip r:embed="rId2">
-            <a:alphaModFix/>
-          </a:blip>
-          <a:stretch>
-            <a:fillRect/>
-          </a:stretch>
-        </p:blipFill>
-        <p:spPr>
-          <a:xfrm>
-            <a:off x="0" y="0"/>
-            <a:ext cx="9143999" cy="5146622"/>
-          </a:xfrm>
-          <a:prstGeom prst="rect">
-            <a:avLst/>
-          </a:prstGeom>
-          <a:noFill/>
-          <a:ln>
-            <a:noFill/>
-          </a:ln>
-        </p:spPr>
-      </p:pic>
       <p:sp>
         <p:nvSpPr>
           <p:cNvPr id="108" name="Google Shape;108;p15"/>
@@ -2213,34 +2157,6 @@
           <a:chExt cx="0" cy="0"/>
         </a:xfrm>
       </p:grpSpPr>
-      <p:pic>
-        <p:nvPicPr>
-          <p:cNvPr id="131" name="Google Shape;131;p19"/>
-          <p:cNvPicPr preferRelativeResize="0"/>
-          <p:nvPr/>
-        </p:nvPicPr>
-        <p:blipFill>
-          <a:blip r:embed="rId2">
-            <a:alphaModFix/>
-          </a:blip>
-          <a:stretch>
-            <a:fillRect/>
-          </a:stretch>
-        </p:blipFill>
-        <p:spPr>
-          <a:xfrm>
-            <a:off x="2774" y="0"/>
-            <a:ext cx="9138452" cy="5143500"/>
-          </a:xfrm>
-          <a:prstGeom prst="rect">
-            <a:avLst/>
-          </a:prstGeom>
-          <a:noFill/>
-          <a:ln>
-            <a:noFill/>
-          </a:ln>
-        </p:spPr>
-      </p:pic>
       <p:sp>
         <p:nvSpPr>
           <p:cNvPr id="132" name="Google Shape;132;p19"/>
@@ -2663,34 +2579,6 @@
           <a:chExt cx="0" cy="0"/>
         </a:xfrm>
       </p:grpSpPr>
-      <p:pic>
-        <p:nvPicPr>
-          <p:cNvPr id="138" name="Google Shape;138;p20"/>
-          <p:cNvPicPr preferRelativeResize="0"/>
-          <p:nvPr/>
-        </p:nvPicPr>
-        <p:blipFill>
-          <a:blip r:embed="rId2">
-            <a:alphaModFix/>
-          </a:blip>
-          <a:stretch>
-            <a:fillRect/>
-          </a:stretch>
-        </p:blipFill>
-        <p:spPr>
-          <a:xfrm>
-            <a:off x="0" y="0"/>
-            <a:ext cx="9144003" cy="5143501"/>
-          </a:xfrm>
-          <a:prstGeom prst="rect">
-            <a:avLst/>
-          </a:prstGeom>
-          <a:noFill/>
-          <a:ln>
-            <a:noFill/>
-          </a:ln>
-        </p:spPr>
-      </p:pic>
       <p:sp>
         <p:nvSpPr>
           <p:cNvPr id="139" name="Google Shape;139;p20"/>
@@ -3755,34 +3643,6 @@
           <a:chExt cx="0" cy="0"/>
         </a:xfrm>
       </p:grpSpPr>
-      <p:pic>
-        <p:nvPicPr>
-          <p:cNvPr id="144" name="Google Shape;144;p21"/>
-          <p:cNvPicPr preferRelativeResize="0"/>
-          <p:nvPr/>
-        </p:nvPicPr>
-        <p:blipFill>
-          <a:blip r:embed="rId2">
-            <a:alphaModFix/>
-          </a:blip>
-          <a:stretch>
-            <a:fillRect/>
-          </a:stretch>
-        </p:blipFill>
-        <p:spPr>
-          <a:xfrm>
-            <a:off x="-3" y="0"/>
-            <a:ext cx="9144003" cy="5143501"/>
-          </a:xfrm>
-          <a:prstGeom prst="rect">
-            <a:avLst/>
-          </a:prstGeom>
-          <a:noFill/>
-          <a:ln>
-            <a:noFill/>
-          </a:ln>
-        </p:spPr>
-      </p:pic>
       <p:sp>
         <p:nvSpPr>
           <p:cNvPr id="145" name="Google Shape;145;p21"/>
@@ -4122,34 +3982,6 @@
           <a:chExt cx="0" cy="0"/>
         </a:xfrm>
       </p:grpSpPr>
-      <p:pic>
-        <p:nvPicPr>
-          <p:cNvPr id="150" name="Google Shape;150;p22"/>
-          <p:cNvPicPr preferRelativeResize="0"/>
-          <p:nvPr/>
-        </p:nvPicPr>
-        <p:blipFill>
-          <a:blip r:embed="rId2">
-            <a:alphaModFix/>
-          </a:blip>
-          <a:stretch>
-            <a:fillRect/>
-          </a:stretch>
-        </p:blipFill>
-        <p:spPr>
-          <a:xfrm>
-            <a:off x="0" y="0"/>
-            <a:ext cx="9144003" cy="5143501"/>
-          </a:xfrm>
-          <a:prstGeom prst="rect">
-            <a:avLst/>
-          </a:prstGeom>
-          <a:noFill/>
-          <a:ln>
-            <a:noFill/>
-          </a:ln>
-        </p:spPr>
-      </p:pic>
       <p:sp>
         <p:nvSpPr>
           <p:cNvPr id="151" name="Google Shape;151;p22"/>
@@ -4572,34 +4404,6 @@
           <a:chExt cx="0" cy="0"/>
         </a:xfrm>
       </p:grpSpPr>
-      <p:pic>
-        <p:nvPicPr>
-          <p:cNvPr id="164" name="Google Shape;164;p24"/>
-          <p:cNvPicPr preferRelativeResize="0"/>
-          <p:nvPr/>
-        </p:nvPicPr>
-        <p:blipFill>
-          <a:blip r:embed="rId2">
-            <a:alphaModFix/>
-          </a:blip>
-          <a:stretch>
-            <a:fillRect/>
-          </a:stretch>
-        </p:blipFill>
-        <p:spPr>
-          <a:xfrm>
-            <a:off x="0" y="0"/>
-            <a:ext cx="9144003" cy="5143501"/>
-          </a:xfrm>
-          <a:prstGeom prst="rect">
-            <a:avLst/>
-          </a:prstGeom>
-          <a:noFill/>
-          <a:ln>
-            <a:noFill/>
-          </a:ln>
-        </p:spPr>
-      </p:pic>
       <p:sp>
         <p:nvSpPr>
           <p:cNvPr id="165" name="Google Shape;165;p24"/>
@@ -4939,34 +4743,6 @@
           <a:chExt cx="0" cy="0"/>
         </a:xfrm>
       </p:grpSpPr>
-      <p:pic>
-        <p:nvPicPr>
-          <p:cNvPr id="176" name="Google Shape;176;p26"/>
-          <p:cNvPicPr preferRelativeResize="0"/>
-          <p:nvPr/>
-        </p:nvPicPr>
-        <p:blipFill>
-          <a:blip r:embed="rId2">
-            <a:alphaModFix/>
-          </a:blip>
-          <a:stretch>
-            <a:fillRect/>
-          </a:stretch>
-        </p:blipFill>
-        <p:spPr>
-          <a:xfrm>
-            <a:off x="0" y="0"/>
-            <a:ext cx="9144003" cy="5143501"/>
-          </a:xfrm>
-          <a:prstGeom prst="rect">
-            <a:avLst/>
-          </a:prstGeom>
-          <a:noFill/>
-          <a:ln>
-            <a:noFill/>
-          </a:ln>
-        </p:spPr>
-      </p:pic>
       <p:sp>
         <p:nvSpPr>
           <p:cNvPr id="177" name="Google Shape;177;p26"/>
@@ -5306,34 +5082,6 @@
           <a:chExt cx="0" cy="0"/>
         </a:xfrm>
       </p:grpSpPr>
-      <p:pic>
-        <p:nvPicPr>
-          <p:cNvPr id="182" name="Google Shape;182;p27"/>
-          <p:cNvPicPr preferRelativeResize="0"/>
-          <p:nvPr/>
-        </p:nvPicPr>
-        <p:blipFill>
-          <a:blip r:embed="rId2">
-            <a:alphaModFix/>
-          </a:blip>
-          <a:stretch>
-            <a:fillRect/>
-          </a:stretch>
-        </p:blipFill>
-        <p:spPr>
-          <a:xfrm>
-            <a:off x="2774" y="0"/>
-            <a:ext cx="9138452" cy="5143500"/>
-          </a:xfrm>
-          <a:prstGeom prst="rect">
-            <a:avLst/>
-          </a:prstGeom>
-          <a:noFill/>
-          <a:ln>
-            <a:noFill/>
-          </a:ln>
-        </p:spPr>
-      </p:pic>
       <p:sp>
         <p:nvSpPr>
           <p:cNvPr id="183" name="Google Shape;183;p27"/>
@@ -5673,34 +5421,6 @@
           <a:chExt cx="0" cy="0"/>
         </a:xfrm>
       </p:grpSpPr>
-      <p:pic>
-        <p:nvPicPr>
-          <p:cNvPr id="188" name="Google Shape;188;p28"/>
-          <p:cNvPicPr preferRelativeResize="0"/>
-          <p:nvPr/>
-        </p:nvPicPr>
-        <p:blipFill>
-          <a:blip r:embed="rId2">
-            <a:alphaModFix/>
-          </a:blip>
-          <a:stretch>
-            <a:fillRect/>
-          </a:stretch>
-        </p:blipFill>
-        <p:spPr>
-          <a:xfrm>
-            <a:off x="0" y="0"/>
-            <a:ext cx="9144003" cy="5143501"/>
-          </a:xfrm>
-          <a:prstGeom prst="rect">
-            <a:avLst/>
-          </a:prstGeom>
-          <a:noFill/>
-          <a:ln>
-            <a:noFill/>
-          </a:ln>
-        </p:spPr>
-      </p:pic>
       <p:sp>
         <p:nvSpPr>
           <p:cNvPr id="189" name="Google Shape;189;p28"/>
@@ -6040,34 +5760,6 @@
           <a:chExt cx="0" cy="0"/>
         </a:xfrm>
       </p:grpSpPr>
-      <p:pic>
-        <p:nvPicPr>
-          <p:cNvPr id="200" name="Google Shape;200;p30"/>
-          <p:cNvPicPr preferRelativeResize="0"/>
-          <p:nvPr/>
-        </p:nvPicPr>
-        <p:blipFill>
-          <a:blip r:embed="rId2">
-            <a:alphaModFix/>
-          </a:blip>
-          <a:stretch>
-            <a:fillRect/>
-          </a:stretch>
-        </p:blipFill>
-        <p:spPr>
-          <a:xfrm>
-            <a:off x="0" y="0"/>
-            <a:ext cx="9144003" cy="5143501"/>
-          </a:xfrm>
-          <a:prstGeom prst="rect">
-            <a:avLst/>
-          </a:prstGeom>
-          <a:noFill/>
-          <a:ln>
-            <a:noFill/>
-          </a:ln>
-        </p:spPr>
-      </p:pic>
       <p:sp>
         <p:nvSpPr>
           <p:cNvPr id="201" name="Google Shape;201;p30"/>
@@ -6407,34 +6099,6 @@
           <a:chExt cx="0" cy="0"/>
         </a:xfrm>
       </p:grpSpPr>
-      <p:pic>
-        <p:nvPicPr>
-          <p:cNvPr id="69" name="Google Shape;69;p8"/>
-          <p:cNvPicPr preferRelativeResize="0"/>
-          <p:nvPr/>
-        </p:nvPicPr>
-        <p:blipFill>
-          <a:blip r:embed="rId2">
-            <a:alphaModFix/>
-          </a:blip>
-          <a:stretch>
-            <a:fillRect/>
-          </a:stretch>
-        </p:blipFill>
-        <p:spPr>
-          <a:xfrm>
-            <a:off x="0" y="0"/>
-            <a:ext cx="9143999" cy="5146622"/>
-          </a:xfrm>
-          <a:prstGeom prst="rect">
-            <a:avLst/>
-          </a:prstGeom>
-          <a:noFill/>
-          <a:ln>
-            <a:noFill/>
-          </a:ln>
-        </p:spPr>
-      </p:pic>
       <p:sp>
         <p:nvSpPr>
           <p:cNvPr id="70" name="Google Shape;70;p8"/>
